--- a/groupe-01-regime-switching-allocation-adaptative/slides/Presentation groupe 14/presentation_vae_hmm.pptx
+++ b/groupe-01-regime-switching-allocation-adaptative/slides/Presentation groupe 14/presentation_vae_hmm.pptx
@@ -5,7 +5,7 @@
     <p:sldMasterId id="2147483648" r:id="rId1"/>
   </p:sldMasterIdLst>
   <p:notesMasterIdLst>
-    <p:notesMasterId r:id="rId17"/>
+    <p:notesMasterId r:id="rId18"/>
   </p:notesMasterIdLst>
   <p:sldIdLst>
     <p:sldId id="256" r:id="rId2"/>
@@ -22,7 +22,8 @@
     <p:sldId id="267" r:id="rId13"/>
     <p:sldId id="268" r:id="rId14"/>
     <p:sldId id="270" r:id="rId15"/>
-    <p:sldId id="269" r:id="rId16"/>
+    <p:sldId id="271" r:id="rId16"/>
+    <p:sldId id="269" r:id="rId17"/>
   </p:sldIdLst>
   <p:sldSz cx="9144000" cy="5143500" type="screen16x9"/>
   <p:notesSz cx="5143500" cy="9144000"/>
@@ -760,6 +761,114 @@
   <p:cSld>
     <p:spTree>
       <p:nvGrpSpPr>
+        <p:cNvPr id="1" name="">
+          <a:extLst>
+            <a:ext uri="{FF2B5EF4-FFF2-40B4-BE49-F238E27FC236}">
+              <a16:creationId xmlns:a16="http://schemas.microsoft.com/office/drawing/2014/main" id="{F7D6D151-908F-17D6-F051-2B2B9688CE73}"/>
+            </a:ext>
+          </a:extLst>
+        </p:cNvPr>
+        <p:cNvGrpSpPr/>
+        <p:nvPr/>
+      </p:nvGrpSpPr>
+      <p:grpSpPr>
+        <a:xfrm>
+          <a:off x="0" y="0"/>
+          <a:ext cx="0" cy="0"/>
+          <a:chOff x="0" y="0"/>
+          <a:chExt cx="0" cy="0"/>
+        </a:xfrm>
+      </p:grpSpPr>
+      <p:sp>
+        <p:nvSpPr>
+          <p:cNvPr id="2" name="Slide Image Placeholder 1">
+            <a:extLst>
+              <a:ext uri="{FF2B5EF4-FFF2-40B4-BE49-F238E27FC236}">
+                <a16:creationId xmlns:a16="http://schemas.microsoft.com/office/drawing/2014/main" id="{B6C762C1-1949-E775-8167-83EA7E2D9F5C}"/>
+              </a:ext>
+            </a:extLst>
+          </p:cNvPr>
+          <p:cNvSpPr>
+            <a:spLocks noGrp="1" noRot="1" noChangeAspect="1"/>
+          </p:cNvSpPr>
+          <p:nvPr>
+            <p:ph type="sldImg"/>
+          </p:nvPr>
+        </p:nvSpPr>
+        <p:spPr/>
+      </p:sp>
+      <p:sp>
+        <p:nvSpPr>
+          <p:cNvPr id="3" name="Notes Placeholder 2">
+            <a:extLst>
+              <a:ext uri="{FF2B5EF4-FFF2-40B4-BE49-F238E27FC236}">
+                <a16:creationId xmlns:a16="http://schemas.microsoft.com/office/drawing/2014/main" id="{BC0090B5-5C97-46CC-C28D-57CCBEE51C64}"/>
+              </a:ext>
+            </a:extLst>
+          </p:cNvPr>
+          <p:cNvSpPr>
+            <a:spLocks noGrp="1"/>
+          </p:cNvSpPr>
+          <p:nvPr>
+            <p:ph type="body" idx="1"/>
+          </p:nvPr>
+        </p:nvSpPr>
+        <p:spPr/>
+        <p:txBody>
+          <a:bodyPr/>
+          <a:lstStyle/>
+          <a:p>
+            <a:endParaRPr lang="en-US" dirty="0"/>
+          </a:p>
+        </p:txBody>
+      </p:sp>
+      <p:sp>
+        <p:nvSpPr>
+          <p:cNvPr id="4" name="Slide Number Placeholder 3">
+            <a:extLst>
+              <a:ext uri="{FF2B5EF4-FFF2-40B4-BE49-F238E27FC236}">
+                <a16:creationId xmlns:a16="http://schemas.microsoft.com/office/drawing/2014/main" id="{0F146E16-4C06-FD36-33AC-DDA6F4265F04}"/>
+              </a:ext>
+            </a:extLst>
+          </p:cNvPr>
+          <p:cNvSpPr>
+            <a:spLocks noGrp="1"/>
+          </p:cNvSpPr>
+          <p:nvPr>
+            <p:ph type="sldNum" sz="quarter" idx="10"/>
+          </p:nvPr>
+        </p:nvSpPr>
+        <p:spPr/>
+        <p:txBody>
+          <a:bodyPr/>
+          <a:lstStyle/>
+          <a:p>
+            <a:fld id="{F7021451-1387-4CA6-816F-3879F97B5CBC}" type="slidenum">
+              <a:rPr lang="en-US"/>
+              <a:t>15</a:t>
+            </a:fld>
+            <a:endParaRPr lang="en-US"/>
+          </a:p>
+        </p:txBody>
+      </p:sp>
+    </p:spTree>
+    <p:extLst>
+      <p:ext uri="{BB962C8B-B14F-4D97-AF65-F5344CB8AC3E}">
+        <p14:creationId xmlns:p14="http://schemas.microsoft.com/office/powerpoint/2010/main" val="3799104769"/>
+      </p:ext>
+    </p:extLst>
+  </p:cSld>
+  <p:clrMapOvr>
+    <a:masterClrMapping/>
+  </p:clrMapOvr>
+</p:notes>
+</file>
+
+<file path=ppt/notesSlides/notesSlide16.xml><?xml version="1.0" encoding="utf-8"?>
+<p:notes xmlns:a="http://schemas.openxmlformats.org/drawingml/2006/main" xmlns:r="http://schemas.openxmlformats.org/officeDocument/2006/relationships" xmlns:p="http://schemas.openxmlformats.org/presentationml/2006/main">
+  <p:cSld>
+    <p:spTree>
+      <p:nvGrpSpPr>
         <p:cNvPr id="1" name=""/>
         <p:cNvGrpSpPr/>
         <p:nvPr/>
@@ -820,7 +929,7 @@
           <a:p>
             <a:fld id="{F7021451-1387-4CA6-816F-3879F97B5CBC}" type="slidenum">
               <a:rPr lang="en-US"/>
-              <a:t>15</a:t>
+              <a:t>16</a:t>
             </a:fld>
             <a:endParaRPr lang="en-US"/>
           </a:p>
@@ -6698,7 +6807,29 @@
                 <a:ea typeface="Calibri" pitchFamily="34" charset="-122"/>
                 <a:cs typeface="Calibri" pitchFamily="34" charset="-120"/>
               </a:rPr>
-              <a:t>Data snooping</a:t>
+              <a:t>Api </a:t>
+            </a:r>
+            <a:r>
+              <a:rPr lang="en-US" sz="1100" b="1" dirty="0" err="1">
+                <a:solidFill>
+                  <a:srgbClr val="C0392B"/>
+                </a:solidFill>
+                <a:latin typeface="Calibri" pitchFamily="34" charset="0"/>
+                <a:ea typeface="Calibri" pitchFamily="34" charset="-122"/>
+                <a:cs typeface="Calibri" pitchFamily="34" charset="-120"/>
+              </a:rPr>
+              <a:t>yfinance</a:t>
+            </a:r>
+            <a:r>
+              <a:rPr lang="en-US" sz="1100" b="1" dirty="0">
+                <a:solidFill>
+                  <a:srgbClr val="C0392B"/>
+                </a:solidFill>
+                <a:latin typeface="Calibri" pitchFamily="34" charset="0"/>
+                <a:ea typeface="Calibri" pitchFamily="34" charset="-122"/>
+                <a:cs typeface="Calibri" pitchFamily="34" charset="-120"/>
+              </a:rPr>
+              <a:t> pas optimal </a:t>
             </a:r>
             <a:endParaRPr lang="en-US" sz="1100" dirty="0"/>
           </a:p>
@@ -6737,7 +6868,95 @@
                 <a:ea typeface="Calibri" pitchFamily="34" charset="-122"/>
                 <a:cs typeface="Calibri" pitchFamily="34" charset="-120"/>
               </a:rPr>
-              <a:t>Test set visualisé pendant le développement. Vrai holdout final non préservé.</a:t>
+              <a:t>Cours de </a:t>
+            </a:r>
+            <a:r>
+              <a:rPr lang="en-US" sz="1000" dirty="0" err="1">
+                <a:solidFill>
+                  <a:srgbClr val="2C3E50"/>
+                </a:solidFill>
+                <a:latin typeface="Calibri" pitchFamily="34" charset="0"/>
+                <a:ea typeface="Calibri" pitchFamily="34" charset="-122"/>
+                <a:cs typeface="Calibri" pitchFamily="34" charset="-120"/>
+              </a:rPr>
+              <a:t>marché</a:t>
+            </a:r>
+            <a:r>
+              <a:rPr lang="en-US" sz="1000" dirty="0">
+                <a:solidFill>
+                  <a:srgbClr val="2C3E50"/>
+                </a:solidFill>
+                <a:latin typeface="Calibri" pitchFamily="34" charset="0"/>
+                <a:ea typeface="Calibri" pitchFamily="34" charset="-122"/>
+                <a:cs typeface="Calibri" pitchFamily="34" charset="-120"/>
+              </a:rPr>
+              <a:t> </a:t>
+            </a:r>
+            <a:r>
+              <a:rPr lang="en-US" sz="1000" dirty="0" err="1">
+                <a:solidFill>
+                  <a:srgbClr val="2C3E50"/>
+                </a:solidFill>
+                <a:latin typeface="Calibri" pitchFamily="34" charset="0"/>
+                <a:ea typeface="Calibri" pitchFamily="34" charset="-122"/>
+                <a:cs typeface="Calibri" pitchFamily="34" charset="-120"/>
+              </a:rPr>
+              <a:t>capté</a:t>
+            </a:r>
+            <a:r>
+              <a:rPr lang="en-US" sz="1000" dirty="0">
+                <a:solidFill>
+                  <a:srgbClr val="2C3E50"/>
+                </a:solidFill>
+                <a:latin typeface="Calibri" pitchFamily="34" charset="0"/>
+                <a:ea typeface="Calibri" pitchFamily="34" charset="-122"/>
+                <a:cs typeface="Calibri" pitchFamily="34" charset="-120"/>
+              </a:rPr>
+              <a:t> </a:t>
+            </a:r>
+            <a:r>
+              <a:rPr lang="en-US" sz="1000" dirty="0" err="1">
+                <a:solidFill>
+                  <a:srgbClr val="2C3E50"/>
+                </a:solidFill>
+                <a:latin typeface="Calibri" pitchFamily="34" charset="0"/>
+                <a:ea typeface="Calibri" pitchFamily="34" charset="-122"/>
+                <a:cs typeface="Calibri" pitchFamily="34" charset="-120"/>
+              </a:rPr>
+              <a:t>uniquement</a:t>
+            </a:r>
+            <a:r>
+              <a:rPr lang="en-US" sz="1000" dirty="0">
+                <a:solidFill>
+                  <a:srgbClr val="2C3E50"/>
+                </a:solidFill>
+                <a:latin typeface="Calibri" pitchFamily="34" charset="0"/>
+                <a:ea typeface="Calibri" pitchFamily="34" charset="-122"/>
+                <a:cs typeface="Calibri" pitchFamily="34" charset="-120"/>
+              </a:rPr>
+              <a:t> </a:t>
+            </a:r>
+            <a:r>
+              <a:rPr lang="en-US" sz="1000" dirty="0" err="1">
+                <a:solidFill>
+                  <a:srgbClr val="2C3E50"/>
+                </a:solidFill>
+                <a:latin typeface="Calibri" pitchFamily="34" charset="0"/>
+                <a:ea typeface="Calibri" pitchFamily="34" charset="-122"/>
+                <a:cs typeface="Calibri" pitchFamily="34" charset="-120"/>
+              </a:rPr>
+              <a:t>en</a:t>
+            </a:r>
+            <a:r>
+              <a:rPr lang="en-US" sz="1000" dirty="0">
+                <a:solidFill>
+                  <a:srgbClr val="2C3E50"/>
+                </a:solidFill>
+                <a:latin typeface="Calibri" pitchFamily="34" charset="0"/>
+                <a:ea typeface="Calibri" pitchFamily="34" charset="-122"/>
+                <a:cs typeface="Calibri" pitchFamily="34" charset="-120"/>
+              </a:rPr>
+              <a:t> cloture. </a:t>
             </a:r>
             <a:endParaRPr lang="en-US" sz="1000" dirty="0"/>
           </a:p>
@@ -7916,6 +8135,394 @@
 </file>
 
 <file path=ppt/slides/slide15.xml><?xml version="1.0" encoding="utf-8"?>
+<p:sld xmlns:a="http://schemas.openxmlformats.org/drawingml/2006/main" xmlns:r="http://schemas.openxmlformats.org/officeDocument/2006/relationships" xmlns:p="http://schemas.openxmlformats.org/presentationml/2006/main">
+  <p:cSld>
+    <p:bg>
+      <p:bgPr>
+        <a:solidFill>
+          <a:srgbClr val="0D1B2A"/>
+        </a:solidFill>
+        <a:effectLst/>
+      </p:bgPr>
+    </p:bg>
+    <p:spTree>
+      <p:nvGrpSpPr>
+        <p:cNvPr id="1" name="">
+          <a:extLst>
+            <a:ext uri="{FF2B5EF4-FFF2-40B4-BE49-F238E27FC236}">
+              <a16:creationId xmlns:a16="http://schemas.microsoft.com/office/drawing/2014/main" id="{19EDDEF2-50AB-43DE-6844-9E5633B63B6F}"/>
+            </a:ext>
+          </a:extLst>
+        </p:cNvPr>
+        <p:cNvGrpSpPr/>
+        <p:nvPr/>
+      </p:nvGrpSpPr>
+      <p:grpSpPr>
+        <a:xfrm>
+          <a:off x="0" y="0"/>
+          <a:ext cx="0" cy="0"/>
+          <a:chOff x="0" y="0"/>
+          <a:chExt cx="0" cy="0"/>
+        </a:xfrm>
+      </p:grpSpPr>
+      <p:sp>
+        <p:nvSpPr>
+          <p:cNvPr id="2" name="Shape 0">
+            <a:extLst>
+              <a:ext uri="{FF2B5EF4-FFF2-40B4-BE49-F238E27FC236}">
+                <a16:creationId xmlns:a16="http://schemas.microsoft.com/office/drawing/2014/main" id="{0852E530-944F-CA62-2E85-ACAEECDC3E11}"/>
+              </a:ext>
+            </a:extLst>
+          </p:cNvPr>
+          <p:cNvSpPr/>
+          <p:nvPr/>
+        </p:nvSpPr>
+        <p:spPr>
+          <a:xfrm>
+            <a:off x="0" y="0"/>
+            <a:ext cx="164592" cy="5143500"/>
+          </a:xfrm>
+          <a:prstGeom prst="rect">
+            <a:avLst/>
+          </a:prstGeom>
+          <a:solidFill>
+            <a:srgbClr val="F39C12"/>
+          </a:solidFill>
+          <a:ln w="12700">
+            <a:solidFill>
+              <a:srgbClr val="F39C12"/>
+            </a:solidFill>
+            <a:prstDash val="solid"/>
+          </a:ln>
+        </p:spPr>
+        <p:txBody>
+          <a:bodyPr/>
+          <a:lstStyle/>
+          <a:p>
+            <a:endParaRPr lang="fr-FR"/>
+          </a:p>
+        </p:txBody>
+      </p:sp>
+      <p:sp>
+        <p:nvSpPr>
+          <p:cNvPr id="3" name="Shape 1">
+            <a:extLst>
+              <a:ext uri="{FF2B5EF4-FFF2-40B4-BE49-F238E27FC236}">
+                <a16:creationId xmlns:a16="http://schemas.microsoft.com/office/drawing/2014/main" id="{9C6321E7-A338-F579-7289-C5913CE435F2}"/>
+              </a:ext>
+            </a:extLst>
+          </p:cNvPr>
+          <p:cNvSpPr/>
+          <p:nvPr/>
+        </p:nvSpPr>
+        <p:spPr>
+          <a:xfrm>
+            <a:off x="5669280" y="0"/>
+            <a:ext cx="3474720" cy="5143500"/>
+          </a:xfrm>
+          <a:prstGeom prst="rect">
+            <a:avLst/>
+          </a:prstGeom>
+          <a:solidFill>
+            <a:srgbClr val="1A6B9A">
+              <a:alpha val="14000"/>
+            </a:srgbClr>
+          </a:solidFill>
+          <a:ln w="12700">
+            <a:solidFill>
+              <a:srgbClr val="0D1B2A"/>
+            </a:solidFill>
+            <a:prstDash val="solid"/>
+          </a:ln>
+        </p:spPr>
+        <p:txBody>
+          <a:bodyPr/>
+          <a:lstStyle/>
+          <a:p>
+            <a:endParaRPr lang="fr-FR"/>
+          </a:p>
+        </p:txBody>
+      </p:sp>
+      <p:sp>
+        <p:nvSpPr>
+          <p:cNvPr id="5" name="Text 3">
+            <a:extLst>
+              <a:ext uri="{FF2B5EF4-FFF2-40B4-BE49-F238E27FC236}">
+                <a16:creationId xmlns:a16="http://schemas.microsoft.com/office/drawing/2014/main" id="{4A3C03A0-BD5F-9569-EA2D-F4CECC64713F}"/>
+              </a:ext>
+            </a:extLst>
+          </p:cNvPr>
+          <p:cNvSpPr/>
+          <p:nvPr/>
+        </p:nvSpPr>
+        <p:spPr>
+          <a:xfrm>
+            <a:off x="457200" y="1477518"/>
+            <a:ext cx="5029200" cy="1097280"/>
+          </a:xfrm>
+          <a:prstGeom prst="rect">
+            <a:avLst/>
+          </a:prstGeom>
+          <a:noFill/>
+          <a:ln/>
+        </p:spPr>
+        <p:txBody>
+          <a:bodyPr wrap="square" rtlCol="0" anchor="ctr"/>
+          <a:lstStyle/>
+          <a:p>
+            <a:pPr marL="0" indent="0">
+              <a:buNone/>
+            </a:pPr>
+            <a:r>
+              <a:rPr lang="en-US" sz="3400" b="1" dirty="0">
+                <a:solidFill>
+                  <a:srgbClr val="FFFFFF"/>
+                </a:solidFill>
+                <a:latin typeface="Calibri" pitchFamily="34" charset="0"/>
+                <a:ea typeface="Calibri" pitchFamily="34" charset="-122"/>
+                <a:cs typeface="Calibri" pitchFamily="34" charset="-120"/>
+              </a:rPr>
+              <a:t>Merci de </a:t>
+            </a:r>
+            <a:r>
+              <a:rPr lang="en-US" sz="3400" b="1" dirty="0" err="1">
+                <a:solidFill>
+                  <a:srgbClr val="FFFFFF"/>
+                </a:solidFill>
+                <a:latin typeface="Calibri" pitchFamily="34" charset="0"/>
+                <a:ea typeface="Calibri" pitchFamily="34" charset="-122"/>
+                <a:cs typeface="Calibri" pitchFamily="34" charset="-120"/>
+              </a:rPr>
+              <a:t>votre</a:t>
+            </a:r>
+            <a:r>
+              <a:rPr lang="en-US" sz="3400" b="1" dirty="0">
+                <a:solidFill>
+                  <a:srgbClr val="FFFFFF"/>
+                </a:solidFill>
+                <a:latin typeface="Calibri" pitchFamily="34" charset="0"/>
+                <a:ea typeface="Calibri" pitchFamily="34" charset="-122"/>
+                <a:cs typeface="Calibri" pitchFamily="34" charset="-120"/>
+              </a:rPr>
+              <a:t> </a:t>
+            </a:r>
+            <a:r>
+              <a:rPr lang="en-US" sz="3400" b="1" dirty="0" err="1">
+                <a:solidFill>
+                  <a:srgbClr val="FFFFFF"/>
+                </a:solidFill>
+                <a:latin typeface="Calibri" pitchFamily="34" charset="0"/>
+                <a:ea typeface="Calibri" pitchFamily="34" charset="-122"/>
+                <a:cs typeface="Calibri" pitchFamily="34" charset="-120"/>
+              </a:rPr>
+              <a:t>écoute</a:t>
+            </a:r>
+            <a:r>
+              <a:rPr lang="en-US" sz="3400" b="1" dirty="0">
+                <a:solidFill>
+                  <a:srgbClr val="FFFFFF"/>
+                </a:solidFill>
+                <a:latin typeface="Calibri" pitchFamily="34" charset="0"/>
+                <a:ea typeface="Calibri" pitchFamily="34" charset="-122"/>
+                <a:cs typeface="Calibri" pitchFamily="34" charset="-120"/>
+              </a:rPr>
+              <a:t> </a:t>
+            </a:r>
+            <a:endParaRPr lang="en-US" sz="3400" dirty="0"/>
+          </a:p>
+        </p:txBody>
+      </p:sp>
+      <p:sp>
+        <p:nvSpPr>
+          <p:cNvPr id="18" name="Text 16">
+            <a:extLst>
+              <a:ext uri="{FF2B5EF4-FFF2-40B4-BE49-F238E27FC236}">
+                <a16:creationId xmlns:a16="http://schemas.microsoft.com/office/drawing/2014/main" id="{23FF41B6-FE70-7611-FF25-54CC1FDE1ABC}"/>
+              </a:ext>
+            </a:extLst>
+          </p:cNvPr>
+          <p:cNvSpPr/>
+          <p:nvPr/>
+        </p:nvSpPr>
+        <p:spPr>
+          <a:xfrm>
+            <a:off x="457200" y="3529584"/>
+            <a:ext cx="5486400" cy="256032"/>
+          </a:xfrm>
+          <a:prstGeom prst="rect">
+            <a:avLst/>
+          </a:prstGeom>
+          <a:noFill/>
+          <a:ln/>
+        </p:spPr>
+        <p:txBody>
+          <a:bodyPr wrap="square" rtlCol="0" anchor="ctr"/>
+          <a:lstStyle/>
+          <a:p>
+            <a:pPr marL="0" indent="0">
+              <a:buNone/>
+            </a:pPr>
+            <a:r>
+              <a:rPr lang="en-US" sz="2000" i="1" dirty="0">
+                <a:solidFill>
+                  <a:schemeClr val="bg1"/>
+                </a:solidFill>
+                <a:latin typeface="Calibri" pitchFamily="34" charset="0"/>
+                <a:ea typeface="Calibri" pitchFamily="34" charset="-122"/>
+                <a:cs typeface="Calibri" pitchFamily="34" charset="-120"/>
+              </a:rPr>
+              <a:t>Questions ?</a:t>
+            </a:r>
+            <a:endParaRPr lang="en-US" sz="2000" dirty="0">
+              <a:solidFill>
+                <a:schemeClr val="bg1"/>
+              </a:solidFill>
+            </a:endParaRPr>
+          </a:p>
+        </p:txBody>
+      </p:sp>
+      <p:sp>
+        <p:nvSpPr>
+          <p:cNvPr id="19" name="Shape 17">
+            <a:extLst>
+              <a:ext uri="{FF2B5EF4-FFF2-40B4-BE49-F238E27FC236}">
+                <a16:creationId xmlns:a16="http://schemas.microsoft.com/office/drawing/2014/main" id="{9B7AA4A0-7C8B-6400-AA30-2FC6F04D91F0}"/>
+              </a:ext>
+            </a:extLst>
+          </p:cNvPr>
+          <p:cNvSpPr/>
+          <p:nvPr/>
+        </p:nvSpPr>
+        <p:spPr>
+          <a:xfrm>
+            <a:off x="0" y="4919472"/>
+            <a:ext cx="9144000" cy="224028"/>
+          </a:xfrm>
+          <a:prstGeom prst="rect">
+            <a:avLst/>
+          </a:prstGeom>
+          <a:solidFill>
+            <a:srgbClr val="0D1B2A"/>
+          </a:solidFill>
+          <a:ln w="12700">
+            <a:solidFill>
+              <a:srgbClr val="0D1B2A"/>
+            </a:solidFill>
+            <a:prstDash val="solid"/>
+          </a:ln>
+        </p:spPr>
+        <p:txBody>
+          <a:bodyPr/>
+          <a:lstStyle/>
+          <a:p>
+            <a:endParaRPr lang="fr-FR"/>
+          </a:p>
+        </p:txBody>
+      </p:sp>
+      <p:sp>
+        <p:nvSpPr>
+          <p:cNvPr id="20" name="Text 18">
+            <a:extLst>
+              <a:ext uri="{FF2B5EF4-FFF2-40B4-BE49-F238E27FC236}">
+                <a16:creationId xmlns:a16="http://schemas.microsoft.com/office/drawing/2014/main" id="{5C63E4DA-B46A-BDD6-E8FD-22D906E1493A}"/>
+              </a:ext>
+            </a:extLst>
+          </p:cNvPr>
+          <p:cNvSpPr/>
+          <p:nvPr/>
+        </p:nvSpPr>
+        <p:spPr>
+          <a:xfrm>
+            <a:off x="274320" y="4928616"/>
+            <a:ext cx="6400800" cy="182880"/>
+          </a:xfrm>
+          <a:prstGeom prst="rect">
+            <a:avLst/>
+          </a:prstGeom>
+          <a:noFill/>
+          <a:ln/>
+        </p:spPr>
+        <p:txBody>
+          <a:bodyPr wrap="square" rtlCol="0" anchor="ctr"/>
+          <a:lstStyle/>
+          <a:p>
+            <a:pPr marL="0" indent="0">
+              <a:buNone/>
+            </a:pPr>
+            <a:r>
+              <a:rPr lang="en-US" sz="800" dirty="0">
+                <a:solidFill>
+                  <a:srgbClr val="B8D4E8"/>
+                </a:solidFill>
+                <a:latin typeface="Calibri" pitchFamily="34" charset="0"/>
+                <a:ea typeface="Calibri" pitchFamily="34" charset="-122"/>
+                <a:cs typeface="Calibri" pitchFamily="34" charset="-120"/>
+              </a:rPr>
+              <a:t>VAE-HMM Pipeline  |  Market Regime Detection</a:t>
+            </a:r>
+            <a:endParaRPr lang="en-US" sz="800" dirty="0"/>
+          </a:p>
+        </p:txBody>
+      </p:sp>
+      <p:sp>
+        <p:nvSpPr>
+          <p:cNvPr id="21" name="Text 19">
+            <a:extLst>
+              <a:ext uri="{FF2B5EF4-FFF2-40B4-BE49-F238E27FC236}">
+                <a16:creationId xmlns:a16="http://schemas.microsoft.com/office/drawing/2014/main" id="{FD6644FD-EE58-EC3A-D0B5-170C88CD3DF4}"/>
+              </a:ext>
+            </a:extLst>
+          </p:cNvPr>
+          <p:cNvSpPr/>
+          <p:nvPr/>
+        </p:nvSpPr>
+        <p:spPr>
+          <a:xfrm>
+            <a:off x="8046720" y="4928616"/>
+            <a:ext cx="822960" cy="182880"/>
+          </a:xfrm>
+          <a:prstGeom prst="rect">
+            <a:avLst/>
+          </a:prstGeom>
+          <a:noFill/>
+          <a:ln/>
+        </p:spPr>
+        <p:txBody>
+          <a:bodyPr wrap="square" rtlCol="0" anchor="ctr"/>
+          <a:lstStyle/>
+          <a:p>
+            <a:pPr marL="0" indent="0" algn="r">
+              <a:buNone/>
+            </a:pPr>
+            <a:r>
+              <a:rPr lang="en-US" sz="800" dirty="0">
+                <a:solidFill>
+                  <a:srgbClr val="B8D4E8"/>
+                </a:solidFill>
+                <a:latin typeface="Calibri" pitchFamily="34" charset="0"/>
+                <a:ea typeface="Calibri" pitchFamily="34" charset="-122"/>
+                <a:cs typeface="Calibri" pitchFamily="34" charset="-120"/>
+              </a:rPr>
+              <a:t>15 / 15</a:t>
+            </a:r>
+            <a:endParaRPr lang="en-US" sz="800" dirty="0"/>
+          </a:p>
+        </p:txBody>
+      </p:sp>
+    </p:spTree>
+    <p:extLst>
+      <p:ext uri="{BB962C8B-B14F-4D97-AF65-F5344CB8AC3E}">
+        <p14:creationId xmlns:p14="http://schemas.microsoft.com/office/powerpoint/2010/main" val="3844726789"/>
+      </p:ext>
+    </p:extLst>
+  </p:cSld>
+  <p:clrMapOvr>
+    <a:masterClrMapping/>
+  </p:clrMapOvr>
+</p:sld>
+</file>
+
+<file path=ppt/slides/slide16.xml><?xml version="1.0" encoding="utf-8"?>
 <p:sld xmlns:a="http://schemas.openxmlformats.org/drawingml/2006/main" xmlns:r="http://schemas.openxmlformats.org/officeDocument/2006/relationships" xmlns:p="http://schemas.openxmlformats.org/presentationml/2006/main">
   <p:cSld name="Slide 14">
     <p:bg>
